--- a/docs/FeelsLike_Presentation.pptx
+++ b/docs/FeelsLike_Presentation.pptx
@@ -3901,7 +3901,7 @@
                 <a:ea typeface="Arial" pitchFamily="34" charset="-122"/>
                 <a:cs typeface="Arial" pitchFamily="34" charset="-120"/>
               </a:rPr>
-              <a:t>Exact triple on unseen phrasings: 80% (tuned split reads higher).</a:t>
+              <a:t>Exact triple on unseen phrasings: 45% (tuned split reads higher).</a:t>
             </a:r>
             <a:endParaRPr lang="en-US" sz="2100" dirty="0"/>
           </a:p>
@@ -4143,7 +4143,7 @@
         </p:nvSpPr>
         <p:spPr>
           <a:xfrm>
-            <a:off x="7143564" y="3285457"/>
+            <a:off x="7143564" y="3554150"/>
             <a:ext cx="971599" cy="392395"/>
           </a:xfrm>
           <a:prstGeom prst="rect">
@@ -4173,7 +4173,7 @@
                 <a:ea typeface="Arial" pitchFamily="34" charset="-122"/>
                 <a:cs typeface="Arial" pitchFamily="34" charset="-120"/>
               </a:rPr>
-              <a:t>95</a:t>
+              <a:t>90</a:t>
             </a:r>
             <a:endParaRPr lang="en-US" sz="1800" dirty="0"/>
           </a:p>
@@ -4187,8 +4187,8 @@
         </p:nvSpPr>
         <p:spPr>
           <a:xfrm>
-            <a:off x="7143564" y="3715910"/>
-            <a:ext cx="895399" cy="5105158"/>
+            <a:off x="7143564" y="3984603"/>
+            <a:ext cx="895399" cy="4836465"/>
           </a:xfrm>
           <a:prstGeom prst="rect">
             <a:avLst/>
@@ -4211,7 +4211,7 @@
         </p:nvSpPr>
         <p:spPr>
           <a:xfrm>
-            <a:off x="8153237" y="3285457"/>
+            <a:off x="8153237" y="3554150"/>
             <a:ext cx="971599" cy="392395"/>
           </a:xfrm>
           <a:prstGeom prst="rect">
@@ -4241,7 +4241,7 @@
                 <a:ea typeface="Arial" pitchFamily="34" charset="-122"/>
                 <a:cs typeface="Arial" pitchFamily="34" charset="-120"/>
               </a:rPr>
-              <a:t>95</a:t>
+              <a:t>90</a:t>
             </a:r>
             <a:endParaRPr lang="en-US" sz="1800" dirty="0"/>
           </a:p>
@@ -4255,8 +4255,8 @@
         </p:nvSpPr>
         <p:spPr>
           <a:xfrm>
-            <a:off x="8153237" y="3715910"/>
-            <a:ext cx="895399" cy="5105158"/>
+            <a:off x="8153237" y="3984603"/>
+            <a:ext cx="895399" cy="4836465"/>
           </a:xfrm>
           <a:prstGeom prst="rect">
             <a:avLst/>
@@ -4279,7 +4279,7 @@
         </p:nvSpPr>
         <p:spPr>
           <a:xfrm>
-            <a:off x="9810588" y="3554149"/>
+            <a:off x="9810588" y="4897612"/>
             <a:ext cx="971599" cy="392395"/>
           </a:xfrm>
           <a:prstGeom prst="rect">
@@ -4309,7 +4309,7 @@
                 <a:ea typeface="Arial" pitchFamily="34" charset="-122"/>
                 <a:cs typeface="Arial" pitchFamily="34" charset="-120"/>
               </a:rPr>
-              <a:t>90</a:t>
+              <a:t>65</a:t>
             </a:r>
             <a:endParaRPr lang="en-US" sz="1800" dirty="0"/>
           </a:p>
@@ -4323,8 +4323,8 @@
         </p:nvSpPr>
         <p:spPr>
           <a:xfrm>
-            <a:off x="9810588" y="3984602"/>
-            <a:ext cx="895399" cy="4836466"/>
+            <a:off x="9810588" y="5328065"/>
+            <a:ext cx="895399" cy="3493003"/>
           </a:xfrm>
           <a:prstGeom prst="rect">
             <a:avLst/>
@@ -4415,7 +4415,7 @@
         </p:nvSpPr>
         <p:spPr>
           <a:xfrm>
-            <a:off x="12477687" y="3822842"/>
+            <a:off x="12477687" y="5166305"/>
             <a:ext cx="971599" cy="392395"/>
           </a:xfrm>
           <a:prstGeom prst="rect">
@@ -4445,7 +4445,7 @@
                 <a:ea typeface="Arial" pitchFamily="34" charset="-122"/>
                 <a:cs typeface="Arial" pitchFamily="34" charset="-120"/>
               </a:rPr>
-              <a:t>85</a:t>
+              <a:t>60</a:t>
             </a:r>
             <a:endParaRPr lang="en-US" sz="1800" dirty="0"/>
           </a:p>
@@ -4459,8 +4459,8 @@
         </p:nvSpPr>
         <p:spPr>
           <a:xfrm>
-            <a:off x="12477687" y="4253295"/>
-            <a:ext cx="895399" cy="4567773"/>
+            <a:off x="12477687" y="5596758"/>
+            <a:ext cx="895399" cy="3224310"/>
           </a:xfrm>
           <a:prstGeom prst="rect">
             <a:avLst/>
@@ -4551,7 +4551,7 @@
         </p:nvSpPr>
         <p:spPr>
           <a:xfrm>
-            <a:off x="15144712" y="4091534"/>
+            <a:off x="15144712" y="5972382"/>
             <a:ext cx="971599" cy="392395"/>
           </a:xfrm>
           <a:prstGeom prst="rect">
@@ -4581,7 +4581,7 @@
                 <a:ea typeface="Arial" pitchFamily="34" charset="-122"/>
                 <a:cs typeface="Arial" pitchFamily="34" charset="-120"/>
               </a:rPr>
-              <a:t>80</a:t>
+              <a:t>45</a:t>
             </a:r>
             <a:endParaRPr lang="en-US" sz="1800" dirty="0"/>
           </a:p>
@@ -4595,8 +4595,8 @@
         </p:nvSpPr>
         <p:spPr>
           <a:xfrm>
-            <a:off x="15144712" y="4521987"/>
-            <a:ext cx="895399" cy="4299081"/>
+            <a:off x="15144712" y="6402835"/>
+            <a:ext cx="895399" cy="2418233"/>
           </a:xfrm>
           <a:prstGeom prst="rect">
             <a:avLst/>
@@ -4619,7 +4619,7 @@
         </p:nvSpPr>
         <p:spPr>
           <a:xfrm>
-            <a:off x="16154384" y="5166335"/>
+            <a:off x="16154384" y="5434997"/>
             <a:ext cx="971599" cy="392395"/>
           </a:xfrm>
           <a:prstGeom prst="rect">
@@ -4649,7 +4649,7 @@
                 <a:ea typeface="Arial" pitchFamily="34" charset="-122"/>
                 <a:cs typeface="Arial" pitchFamily="34" charset="-120"/>
               </a:rPr>
-              <a:t>60</a:t>
+              <a:t>55</a:t>
             </a:r>
             <a:endParaRPr lang="en-US" sz="1800" dirty="0"/>
           </a:p>
@@ -4663,8 +4663,8 @@
         </p:nvSpPr>
         <p:spPr>
           <a:xfrm>
-            <a:off x="16154384" y="5596788"/>
-            <a:ext cx="895399" cy="3224280"/>
+            <a:off x="16154384" y="5865450"/>
+            <a:ext cx="895399" cy="2955618"/>
           </a:xfrm>
           <a:prstGeom prst="rect">
             <a:avLst/>
@@ -8381,7 +8381,7 @@
                 <a:ea typeface="Arial" pitchFamily="34" charset="-122"/>
                 <a:cs typeface="Arial" pitchFamily="34" charset="-120"/>
               </a:rPr>
-              <a:t>Blind-probe exact-triple NLP accuracy is 80% on unseen phrasing.</a:t>
+              <a:t>Blind-probe exact-triple NLP accuracy is 45% on unseen phrasing.</a:t>
             </a:r>
             <a:endParaRPr lang="en-US" sz="2100" dirty="0"/>
           </a:p>
